--- a/docs/content/quarto/quarto_activity.pptx
+++ b/docs/content/quarto/quarto_activity.pptx
@@ -16,6 +16,7 @@
     <p:sldId id="264" r:id="rId10"/>
     <p:sldId id="265" r:id="rId11"/>
     <p:sldId id="266" r:id="rId12"/>
+    <p:sldId id="267" r:id="rId13"/>
   </p:sldIdLst>
   <p:sldSz cx="9144000" cy="5143500" type="screen16x9"/>
   <p:notesSz cx="6858000" cy="9144000"/>
@@ -3379,48 +3380,30 @@
       </p:grpSpPr>
       <p:sp>
         <p:nvSpPr>
-          <p:cNvPr id="2" name="Title 1"/>
-          <p:cNvSpPr>
-            <a:spLocks noGrp="1"/>
-          </p:cNvSpPr>
-          <p:nvPr>
-            <p:ph type="title"/>
-          </p:nvPr>
-        </p:nvSpPr>
-        <p:spPr>
-          <a:xfrm>
-            <a:off x="0" y="0"/>
-            <a:ext cx="9144000" cy="582780"/>
-          </a:xfrm>
-        </p:spPr>
+          <p:cNvPr id="3" name="Content Placeholder 2"/>
+          <p:cNvSpPr>
+            <a:spLocks noGrp="1"/>
+          </p:cNvSpPr>
+          <p:nvPr>
+            <p:ph idx="1"/>
+          </p:nvPr>
+        </p:nvSpPr>
+        <p:spPr/>
         <p:txBody>
           <a:bodyPr/>
           <a:lstStyle/>
           <a:p>
             <a:pPr lvl="0" indent="0" marL="0">
-              <a:buNone/>
-            </a:pPr>
-            <a:r>
-              <a:rPr/>
+              <a:spcBef>
+                <a:spcPts val="3000"/>
+              </a:spcBef>
+              <a:buNone/>
+            </a:pPr>
+            <a:r>
+              <a:rPr b="1"/>
               <a:t>Check yourself</a:t>
             </a:r>
           </a:p>
-        </p:txBody>
-      </p:sp>
-      <p:sp>
-        <p:nvSpPr>
-          <p:cNvPr id="3" name="Content Placeholder 2"/>
-          <p:cNvSpPr>
-            <a:spLocks noGrp="1"/>
-          </p:cNvSpPr>
-          <p:nvPr>
-            <p:ph idx="1"/>
-          </p:nvPr>
-        </p:nvSpPr>
-        <p:spPr/>
-        <p:txBody>
-          <a:bodyPr/>
-          <a:lstStyle/>
           <a:p>
             <a:pPr lvl="0" indent="0" marL="0">
               <a:buNone/>
@@ -3597,7 +3580,7 @@
             </a:pPr>
             <a:r>
               <a:rPr/>
-              <a:t>Turn it in</a:t>
+              <a:t>Extension — out of class (~30–40 min)</a:t>
             </a:r>
           </a:p>
         </p:txBody>
@@ -3616,6 +3599,430 @@
         <p:txBody>
           <a:bodyPr/>
           <a:lstStyle/>
+          <a:p>
+            <a:pPr lvl="0" indent="0" marL="0">
+              <a:buNone/>
+            </a:pPr>
+            <a:r>
+              <a:rPr i="1"/>
+              <a:t>Turn this in with your worksheet, in the same </a:t>
+            </a:r>
+            <a:r>
+              <a:rPr i="1">
+                <a:latin typeface="Courier"/>
+              </a:rPr>
+              <a:t>.qmd</a:t>
+            </a:r>
+            <a:r>
+              <a:rPr i="1"/>
+              <a:t> you built in class. This adds Quarto features you have </a:t>
+            </a:r>
+            <a:r>
+              <a:rPr b="1" i="1"/>
+              <a:t>not</a:t>
+            </a:r>
+            <a:r>
+              <a:rPr i="1"/>
+              <a:t> seen yet — cross-references and callouts.</a:t>
+            </a:r>
+          </a:p>
+          <a:p>
+            <a:pPr lvl="0" indent="0" marL="1270000">
+              <a:buNone/>
+            </a:pPr>
+            <a:r>
+              <a:rPr sz="2000" b="1"/>
+              <a:t>Important</a:t>
+            </a:r>
+          </a:p>
+          <a:p>
+            <a:pPr lvl="0" indent="0" marL="1270000">
+              <a:buNone/>
+            </a:pPr>
+            <a:r>
+              <a:rPr sz="2000" b="1"/>
+              <a:t>E2 and E3 must be handwritten</a:t>
+            </a:r>
+            <a:r>
+              <a:rPr sz="2000"/>
+              <a:t> on paper, photographed, and embedded in the report. Typed answers get </a:t>
+            </a:r>
+            <a:r>
+              <a:rPr sz="2000" b="1"/>
+              <a:t>at most half credit, even if correct</a:t>
+            </a:r>
+            <a:r>
+              <a:rPr sz="2000"/>
+              <a:t> — E2 is your prediction </a:t>
+            </a:r>
+            <a:r>
+              <a:rPr sz="2000" i="1"/>
+              <a:t>before</a:t>
+            </a:r>
+            <a:r>
+              <a:rPr sz="2000"/>
+              <a:t> the render.</a:t>
+            </a:r>
+          </a:p>
+          <a:p>
+            <a:pPr lvl="0" indent="0" marL="0">
+              <a:spcBef>
+                <a:spcPts val="3000"/>
+              </a:spcBef>
+              <a:buNone/>
+            </a:pPr>
+            <a:r>
+              <a:rPr b="1"/>
+              <a:t>E1 · Cross-reference your table and figure (4 pts)</a:t>
+            </a:r>
+          </a:p>
+          <a:p>
+            <a:pPr lvl="0" indent="0" marL="0">
+              <a:buNone/>
+            </a:pPr>
+            <a:r>
+              <a:rPr/>
+              <a:t>Quarto can number your table and figure and let your prose refer to them by number automatically, so it stays correct even if you reorder things.</a:t>
+            </a:r>
+          </a:p>
+          <a:p>
+            <a:pPr lvl="0" indent="-342900" marL="342900">
+              <a:buAutoNum type="arabicPeriod"/>
+            </a:pPr>
+            <a:r>
+              <a:rPr/>
+              <a:t>Give your table chunk </a:t>
+            </a:r>
+            <a:r>
+              <a:rPr>
+                <a:latin typeface="Courier"/>
+              </a:rPr>
+              <a:t>#| label: tbl-summary</a:t>
+            </a:r>
+            <a:r>
+              <a:rPr/>
+              <a:t> and </a:t>
+            </a:r>
+            <a:r>
+              <a:rPr>
+                <a:latin typeface="Courier"/>
+              </a:rPr>
+              <a:t>#| tbl-cap: "..."</a:t>
+            </a:r>
+            <a:r>
+              <a:rPr/>
+              <a:t>.</a:t>
+            </a:r>
+          </a:p>
+          <a:p>
+            <a:pPr lvl="0" indent="-342900" marL="342900">
+              <a:buAutoNum type="arabicPeriod"/>
+            </a:pPr>
+            <a:r>
+              <a:rPr/>
+              <a:t>Give your figure chunk </a:t>
+            </a:r>
+            <a:r>
+              <a:rPr>
+                <a:latin typeface="Courier"/>
+              </a:rPr>
+              <a:t>#| label: fig-leaf</a:t>
+            </a:r>
+            <a:r>
+              <a:rPr/>
+              <a:t> and </a:t>
+            </a:r>
+            <a:r>
+              <a:rPr>
+                <a:latin typeface="Courier"/>
+              </a:rPr>
+              <a:t>#| fig-cap: "..."</a:t>
+            </a:r>
+            <a:r>
+              <a:rPr/>
+              <a:t>.</a:t>
+            </a:r>
+          </a:p>
+          <a:p>
+            <a:pPr lvl="0" indent="-342900" marL="342900">
+              <a:buAutoNum type="arabicPeriod"/>
+            </a:pPr>
+            <a:r>
+              <a:rPr/>
+              <a:t>In your Results prose, write </a:t>
+            </a:r>
+            <a:r>
+              <a:rPr>
+                <a:latin typeface="Courier"/>
+              </a:rPr>
+              <a:t>@tbl-summary</a:t>
+            </a:r>
+            <a:r>
+              <a:rPr/>
+              <a:t> and </a:t>
+            </a:r>
+            <a:r>
+              <a:rPr>
+                <a:latin typeface="Courier"/>
+              </a:rPr>
+              <a:t>@fig-leaf</a:t>
+            </a:r>
+            <a:r>
+              <a:rPr/>
+              <a:t> instead of “the table above” / “the figure below”. Render and check the numbers appear.</a:t>
+            </a:r>
+          </a:p>
+          <a:p>
+            <a:pPr lvl="0" indent="-342900" marL="342900">
+              <a:buAutoNum type="arabicPeriod"/>
+            </a:pPr>
+            <a:r>
+              <a:rPr/>
+              <a:t>Add </a:t>
+            </a:r>
+            <a:r>
+              <a:rPr b="1"/>
+              <a:t>one callout of your own</a:t>
+            </a:r>
+            <a:r>
+              <a:rPr/>
+              <a:t> (</a:t>
+            </a:r>
+            <a:r>
+              <a:rPr>
+                <a:latin typeface="Courier"/>
+              </a:rPr>
+              <a:t>::: callout-note/-warning/-tip</a:t>
+            </a:r>
+            <a:r>
+              <a:rPr/>
+              <a:t>) flagging a </a:t>
+            </a:r>
+            <a:r>
+              <a:rPr i="1"/>
+              <a:t>real</a:t>
+            </a:r>
+            <a:r>
+              <a:rPr/>
+              <a:t> limitation of your analysis (small n, an outlier you kept, an assumption you’re unsure of) — not a generic one.</a:t>
+            </a:r>
+          </a:p>
+          <a:p>
+            <a:pPr lvl="0" indent="0" marL="0">
+              <a:buNone/>
+            </a:pPr>
+            <a:r>
+              <a:rPr/>
+              <a:t>Record the </a:t>
+            </a:r>
+            <a:r>
+              <a:rPr>
+                <a:latin typeface="Courier"/>
+              </a:rPr>
+              <a:t>label:</a:t>
+            </a:r>
+            <a:r>
+              <a:rPr/>
+              <a:t> lines you added and the exact sentence where you used </a:t>
+            </a:r>
+            <a:r>
+              <a:rPr>
+                <a:latin typeface="Courier"/>
+              </a:rPr>
+              <a:t>@tbl-summary</a:t>
+            </a:r>
+            <a:r>
+              <a:rPr/>
+              <a:t> or </a:t>
+            </a:r>
+            <a:r>
+              <a:rPr>
+                <a:latin typeface="Courier"/>
+              </a:rPr>
+              <a:t>@fig-leaf</a:t>
+            </a:r>
+            <a:r>
+              <a:rPr/>
+              <a:t>.</a:t>
+            </a:r>
+          </a:p>
+          <a:p>
+            <a:pPr lvl="0" indent="0" marL="0">
+              <a:spcBef>
+                <a:spcPts val="3000"/>
+              </a:spcBef>
+              <a:buNone/>
+            </a:pPr>
+            <a:r>
+              <a:rPr b="1"/>
+              <a:t>E2 · Predict, then check — ✍️ by hand (3 pts)</a:t>
+            </a:r>
+          </a:p>
+          <a:p>
+            <a:pPr lvl="0" indent="0" marL="0">
+              <a:buNone/>
+            </a:pPr>
+            <a:r>
+              <a:rPr b="1"/>
+              <a:t>Before touching any chunk options:</a:t>
+            </a:r>
+            <a:r>
+              <a:rPr/>
+              <a:t> if you added </a:t>
+            </a:r>
+            <a:r>
+              <a:rPr>
+                <a:latin typeface="Courier"/>
+              </a:rPr>
+              <a:t>#| echo: false</a:t>
+            </a:r>
+            <a:r>
+              <a:rPr/>
+              <a:t> to </a:t>
+            </a:r>
+            <a:r>
+              <a:rPr i="1"/>
+              <a:t>only</a:t>
+            </a:r>
+            <a:r>
+              <a:rPr/>
+              <a:t> the chunk that computes your summary table (not the whole document), what exactly changes in the rendered Word doc, and what stays identical? Be specific about which chunks are affected. Then make the change, render, and write whether you were right.</a:t>
+            </a:r>
+          </a:p>
+          <a:p>
+            <a:pPr lvl="0" indent="0" marL="0">
+              <a:spcBef>
+                <a:spcPts val="3000"/>
+              </a:spcBef>
+              <a:buNone/>
+            </a:pPr>
+            <a:r>
+              <a:rPr b="1"/>
+              <a:t>E3 · Explain it — ✍️ by hand (3 pts)</a:t>
+            </a:r>
+          </a:p>
+          <a:p>
+            <a:pPr lvl="0" indent="0" marL="0">
+              <a:buNone/>
+            </a:pPr>
+            <a:r>
+              <a:rPr/>
+              <a:t>As if explaining to a classmate who missed this unit:</a:t>
+            </a:r>
+          </a:p>
+          <a:p>
+            <a:pPr lvl="0" indent="-342900" marL="342900">
+              <a:buAutoNum type="arabicPeriod"/>
+            </a:pPr>
+            <a:r>
+              <a:rPr/>
+              <a:t>Point to </a:t>
+            </a:r>
+            <a:r>
+              <a:rPr b="1"/>
+              <a:t>one chunk in your own report</a:t>
+            </a:r>
+            <a:r>
+              <a:rPr/>
+              <a:t> and say why you set </a:t>
+            </a:r>
+            <a:r>
+              <a:rPr>
+                <a:latin typeface="Courier"/>
+              </a:rPr>
+              <a:t>echo</a:t>
+            </a:r>
+            <a:r>
+              <a:rPr/>
+              <a:t> the way you did for </a:t>
+            </a:r>
+            <a:r>
+              <a:rPr i="1"/>
+              <a:t>that</a:t>
+            </a:r>
+            <a:r>
+              <a:rPr/>
+              <a:t> chunk.</a:t>
+            </a:r>
+          </a:p>
+          <a:p>
+            <a:pPr lvl="0" indent="-342900" marL="342900">
+              <a:buAutoNum type="arabicPeriod"/>
+            </a:pPr>
+            <a:r>
+              <a:rPr/>
+              <a:t>If someone changed one number in your raw data file, walk through exactly what happens the next time you press Render — which chunks rerun, which outputs change, which don’t.</a:t>
+            </a:r>
+          </a:p>
+          <a:p>
+            <a:pPr lvl="0" indent="-342900" marL="342900">
+              <a:buAutoNum type="arabicPeriod"/>
+            </a:pPr>
+            <a:r>
+              <a:rPr/>
+              <a:t>Why is referring to </a:t>
+            </a:r>
+            <a:r>
+              <a:rPr>
+                <a:latin typeface="Courier"/>
+              </a:rPr>
+              <a:t>@tbl-summary</a:t>
+            </a:r>
+            <a:r>
+              <a:rPr/>
+              <a:t> safer than typing “Table 1” by hand?</a:t>
+            </a:r>
+          </a:p>
+        </p:txBody>
+      </p:sp>
+    </p:spTree>
+  </p:cSld>
+</p:sld>
+</file>
+
+<file path=ppt/slides/slide12.xml><?xml version="1.0" encoding="utf-8"?>
+<p:sld xmlns:a="http://schemas.openxmlformats.org/drawingml/2006/main" xmlns:r="http://schemas.openxmlformats.org/officeDocument/2006/relationships" xmlns:p="http://schemas.openxmlformats.org/presentationml/2006/main">
+  <p:cSld>
+    <p:spTree>
+      <p:nvGrpSpPr>
+        <p:cNvPr id="1" name=""/>
+        <p:cNvGrpSpPr/>
+        <p:nvPr/>
+      </p:nvGrpSpPr>
+      <p:grpSpPr>
+        <a:xfrm>
+          <a:off x="0" y="0"/>
+          <a:ext cx="0" cy="0"/>
+          <a:chOff x="0" y="0"/>
+          <a:chExt cx="0" cy="0"/>
+        </a:xfrm>
+      </p:grpSpPr>
+      <p:sp>
+        <p:nvSpPr>
+          <p:cNvPr id="3" name="Content Placeholder 2"/>
+          <p:cNvSpPr>
+            <a:spLocks noGrp="1"/>
+          </p:cNvSpPr>
+          <p:nvPr>
+            <p:ph idx="1"/>
+          </p:nvPr>
+        </p:nvSpPr>
+        <p:spPr/>
+        <p:txBody>
+          <a:bodyPr/>
+          <a:lstStyle/>
+          <a:p>
+            <a:pPr lvl="0" indent="0" marL="0">
+              <a:spcBef>
+                <a:spcPts val="3000"/>
+              </a:spcBef>
+              <a:buNone/>
+            </a:pPr>
+            <a:r>
+              <a:rPr b="1"/>
+              <a:t>Turn it in</a:t>
+            </a:r>
+          </a:p>
           <a:p>
             <a:pPr lvl="0" indent="0" marL="0">
               <a:buNone/>
@@ -3720,48 +4127,30 @@
       </p:grpSpPr>
       <p:sp>
         <p:nvSpPr>
-          <p:cNvPr id="2" name="Title 1"/>
-          <p:cNvSpPr>
-            <a:spLocks noGrp="1"/>
-          </p:cNvSpPr>
-          <p:nvPr>
-            <p:ph type="title"/>
-          </p:nvPr>
-        </p:nvSpPr>
-        <p:spPr>
-          <a:xfrm>
-            <a:off x="0" y="0"/>
-            <a:ext cx="9144000" cy="582780"/>
-          </a:xfrm>
-        </p:spPr>
+          <p:cNvPr id="3" name="Content Placeholder 2"/>
+          <p:cNvSpPr>
+            <a:spLocks noGrp="1"/>
+          </p:cNvSpPr>
+          <p:nvPr>
+            <p:ph idx="1"/>
+          </p:nvPr>
+        </p:nvSpPr>
+        <p:spPr/>
         <p:txBody>
           <a:bodyPr/>
           <a:lstStyle/>
           <a:p>
             <a:pPr lvl="0" indent="0" marL="0">
-              <a:buNone/>
-            </a:pPr>
-            <a:r>
-              <a:rPr/>
+              <a:spcBef>
+                <a:spcPts val="3000"/>
+              </a:spcBef>
+              <a:buNone/>
+            </a:pPr>
+            <a:r>
+              <a:rPr b="1"/>
               <a:t>Before you start</a:t>
             </a:r>
           </a:p>
-        </p:txBody>
-      </p:sp>
-      <p:sp>
-        <p:nvSpPr>
-          <p:cNvPr id="3" name="Content Placeholder 2"/>
-          <p:cNvSpPr>
-            <a:spLocks noGrp="1"/>
-          </p:cNvSpPr>
-          <p:nvPr>
-            <p:ph idx="1"/>
-          </p:nvPr>
-        </p:nvSpPr>
-        <p:spPr/>
-        <p:txBody>
-          <a:bodyPr/>
-          <a:lstStyle/>
           <a:p>
             <a:pPr lvl="0" indent="0" marL="0">
               <a:buNone/>
@@ -3972,48 +4361,30 @@
       </p:grpSpPr>
       <p:sp>
         <p:nvSpPr>
-          <p:cNvPr id="2" name="Title 1"/>
-          <p:cNvSpPr>
-            <a:spLocks noGrp="1"/>
-          </p:cNvSpPr>
-          <p:nvPr>
-            <p:ph type="title"/>
-          </p:nvPr>
-        </p:nvSpPr>
-        <p:spPr>
-          <a:xfrm>
-            <a:off x="0" y="0"/>
-            <a:ext cx="9144000" cy="582780"/>
-          </a:xfrm>
-        </p:spPr>
+          <p:cNvPr id="3" name="Content Placeholder 2"/>
+          <p:cNvSpPr>
+            <a:spLocks noGrp="1"/>
+          </p:cNvSpPr>
+          <p:nvPr>
+            <p:ph idx="1"/>
+          </p:nvPr>
+        </p:nvSpPr>
+        <p:spPr/>
         <p:txBody>
           <a:bodyPr/>
           <a:lstStyle/>
           <a:p>
             <a:pPr lvl="0" indent="0" marL="0">
-              <a:buNone/>
-            </a:pPr>
-            <a:r>
-              <a:rPr/>
+              <a:spcBef>
+                <a:spcPts val="3000"/>
+              </a:spcBef>
+              <a:buNone/>
+            </a:pPr>
+            <a:r>
+              <a:rPr b="1"/>
               <a:t>Step 1 · Make a new Quarto document</a:t>
             </a:r>
           </a:p>
-        </p:txBody>
-      </p:sp>
-      <p:sp>
-        <p:nvSpPr>
-          <p:cNvPr id="3" name="Content Placeholder 2"/>
-          <p:cNvSpPr>
-            <a:spLocks noGrp="1"/>
-          </p:cNvSpPr>
-          <p:nvPr>
-            <p:ph idx="1"/>
-          </p:nvPr>
-        </p:nvSpPr>
-        <p:spPr/>
-        <p:txBody>
-          <a:bodyPr/>
-          <a:lstStyle/>
           <a:p>
             <a:pPr lvl="0" indent="0" marL="0">
               <a:buNone/>
@@ -4105,48 +4476,30 @@
       </p:grpSpPr>
       <p:sp>
         <p:nvSpPr>
-          <p:cNvPr id="2" name="Title 1"/>
-          <p:cNvSpPr>
-            <a:spLocks noGrp="1"/>
-          </p:cNvSpPr>
-          <p:nvPr>
-            <p:ph type="title"/>
-          </p:nvPr>
-        </p:nvSpPr>
-        <p:spPr>
-          <a:xfrm>
-            <a:off x="0" y="0"/>
-            <a:ext cx="9144000" cy="582780"/>
-          </a:xfrm>
-        </p:spPr>
+          <p:cNvPr id="3" name="Content Placeholder 2"/>
+          <p:cNvSpPr>
+            <a:spLocks noGrp="1"/>
+          </p:cNvSpPr>
+          <p:nvPr>
+            <p:ph idx="1"/>
+          </p:nvPr>
+        </p:nvSpPr>
+        <p:spPr/>
         <p:txBody>
           <a:bodyPr/>
           <a:lstStyle/>
           <a:p>
             <a:pPr lvl="0" indent="0" marL="0">
-              <a:buNone/>
-            </a:pPr>
-            <a:r>
-              <a:rPr/>
+              <a:spcBef>
+                <a:spcPts val="3000"/>
+              </a:spcBef>
+              <a:buNone/>
+            </a:pPr>
+            <a:r>
+              <a:rPr b="1"/>
               <a:t>Step 2 · Write the YAML front matter</a:t>
             </a:r>
           </a:p>
-        </p:txBody>
-      </p:sp>
-      <p:sp>
-        <p:nvSpPr>
-          <p:cNvPr id="3" name="Content Placeholder 2"/>
-          <p:cNvSpPr>
-            <a:spLocks noGrp="1"/>
-          </p:cNvSpPr>
-          <p:nvPr>
-            <p:ph idx="1"/>
-          </p:nvPr>
-        </p:nvSpPr>
-        <p:spPr/>
-        <p:txBody>
-          <a:bodyPr/>
-          <a:lstStyle/>
           <a:p>
             <a:pPr lvl="0" indent="0" marL="0">
               <a:buNone/>
@@ -4389,48 +4742,30 @@
       </p:grpSpPr>
       <p:sp>
         <p:nvSpPr>
-          <p:cNvPr id="2" name="Title 1"/>
-          <p:cNvSpPr>
-            <a:spLocks noGrp="1"/>
-          </p:cNvSpPr>
-          <p:nvPr>
-            <p:ph type="title"/>
-          </p:nvPr>
-        </p:nvSpPr>
-        <p:spPr>
-          <a:xfrm>
-            <a:off x="0" y="0"/>
-            <a:ext cx="9144000" cy="582780"/>
-          </a:xfrm>
-        </p:spPr>
+          <p:cNvPr id="3" name="Content Placeholder 2"/>
+          <p:cNvSpPr>
+            <a:spLocks noGrp="1"/>
+          </p:cNvSpPr>
+          <p:nvPr>
+            <p:ph idx="1"/>
+          </p:nvPr>
+        </p:nvSpPr>
+        <p:spPr/>
         <p:txBody>
           <a:bodyPr/>
           <a:lstStyle/>
           <a:p>
             <a:pPr lvl="0" indent="0" marL="0">
-              <a:buNone/>
-            </a:pPr>
-            <a:r>
-              <a:rPr/>
+              <a:spcBef>
+                <a:spcPts val="3000"/>
+              </a:spcBef>
+              <a:buNone/>
+            </a:pPr>
+            <a:r>
+              <a:rPr b="1"/>
               <a:t>Step 3 · Add some Markdown text</a:t>
             </a:r>
           </a:p>
-        </p:txBody>
-      </p:sp>
-      <p:sp>
-        <p:nvSpPr>
-          <p:cNvPr id="3" name="Content Placeholder 2"/>
-          <p:cNvSpPr>
-            <a:spLocks noGrp="1"/>
-          </p:cNvSpPr>
-          <p:nvPr>
-            <p:ph idx="1"/>
-          </p:nvPr>
-        </p:nvSpPr>
-        <p:spPr/>
-        <p:txBody>
-          <a:bodyPr/>
-          <a:lstStyle/>
           <a:p>
             <a:pPr lvl="0" indent="0" marL="0">
               <a:buNone/>
@@ -4559,48 +4894,30 @@
       </p:grpSpPr>
       <p:sp>
         <p:nvSpPr>
-          <p:cNvPr id="2" name="Title 1"/>
-          <p:cNvSpPr>
-            <a:spLocks noGrp="1"/>
-          </p:cNvSpPr>
-          <p:nvPr>
-            <p:ph type="title"/>
-          </p:nvPr>
-        </p:nvSpPr>
-        <p:spPr>
-          <a:xfrm>
-            <a:off x="0" y="0"/>
-            <a:ext cx="9144000" cy="582780"/>
-          </a:xfrm>
-        </p:spPr>
+          <p:cNvPr id="3" name="Content Placeholder 2"/>
+          <p:cNvSpPr>
+            <a:spLocks noGrp="1"/>
+          </p:cNvSpPr>
+          <p:nvPr>
+            <p:ph idx="1"/>
+          </p:nvPr>
+        </p:nvSpPr>
+        <p:spPr/>
         <p:txBody>
           <a:bodyPr/>
           <a:lstStyle/>
           <a:p>
             <a:pPr lvl="0" indent="0" marL="0">
-              <a:buNone/>
-            </a:pPr>
-            <a:r>
-              <a:rPr/>
+              <a:spcBef>
+                <a:spcPts val="3000"/>
+              </a:spcBef>
+              <a:buNone/>
+            </a:pPr>
+            <a:r>
+              <a:rPr b="1"/>
               <a:t>Step 4 · Add a code chunk (and name it)</a:t>
             </a:r>
           </a:p>
-        </p:txBody>
-      </p:sp>
-      <p:sp>
-        <p:nvSpPr>
-          <p:cNvPr id="3" name="Content Placeholder 2"/>
-          <p:cNvSpPr>
-            <a:spLocks noGrp="1"/>
-          </p:cNvSpPr>
-          <p:nvPr>
-            <p:ph idx="1"/>
-          </p:nvPr>
-        </p:nvSpPr>
-        <p:spPr/>
-        <p:txBody>
-          <a:bodyPr/>
-          <a:lstStyle/>
           <a:p>
             <a:pPr lvl="0" indent="0" marL="0">
               <a:buNone/>
@@ -4826,48 +5143,30 @@
       </p:grpSpPr>
       <p:sp>
         <p:nvSpPr>
-          <p:cNvPr id="2" name="Title 1"/>
-          <p:cNvSpPr>
-            <a:spLocks noGrp="1"/>
-          </p:cNvSpPr>
-          <p:nvPr>
-            <p:ph type="title"/>
-          </p:nvPr>
-        </p:nvSpPr>
-        <p:spPr>
-          <a:xfrm>
-            <a:off x="0" y="0"/>
-            <a:ext cx="9144000" cy="582780"/>
-          </a:xfrm>
-        </p:spPr>
+          <p:cNvPr id="3" name="Content Placeholder 2"/>
+          <p:cNvSpPr>
+            <a:spLocks noGrp="1"/>
+          </p:cNvSpPr>
+          <p:nvPr>
+            <p:ph idx="1"/>
+          </p:nvPr>
+        </p:nvSpPr>
+        <p:spPr/>
         <p:txBody>
           <a:bodyPr/>
           <a:lstStyle/>
           <a:p>
             <a:pPr lvl="0" indent="0" marL="0">
-              <a:buNone/>
-            </a:pPr>
-            <a:r>
-              <a:rPr/>
+              <a:spcBef>
+                <a:spcPts val="3000"/>
+              </a:spcBef>
+              <a:buNone/>
+            </a:pPr>
+            <a:r>
+              <a:rPr b="1"/>
               <a:t>Step 5 · Compute a result and drop it into a sentence</a:t>
             </a:r>
           </a:p>
-        </p:txBody>
-      </p:sp>
-      <p:sp>
-        <p:nvSpPr>
-          <p:cNvPr id="3" name="Content Placeholder 2"/>
-          <p:cNvSpPr>
-            <a:spLocks noGrp="1"/>
-          </p:cNvSpPr>
-          <p:nvPr>
-            <p:ph idx="1"/>
-          </p:nvPr>
-        </p:nvSpPr>
-        <p:spPr/>
-        <p:txBody>
-          <a:bodyPr/>
-          <a:lstStyle/>
           <a:p>
             <a:pPr lvl="0" indent="0" marL="0">
               <a:buNone/>
@@ -5250,48 +5549,30 @@
       </p:grpSpPr>
       <p:sp>
         <p:nvSpPr>
-          <p:cNvPr id="2" name="Title 1"/>
-          <p:cNvSpPr>
-            <a:spLocks noGrp="1"/>
-          </p:cNvSpPr>
-          <p:nvPr>
-            <p:ph type="title"/>
-          </p:nvPr>
-        </p:nvSpPr>
-        <p:spPr>
-          <a:xfrm>
-            <a:off x="0" y="0"/>
-            <a:ext cx="9144000" cy="582780"/>
-          </a:xfrm>
-        </p:spPr>
+          <p:cNvPr id="3" name="Content Placeholder 2"/>
+          <p:cNvSpPr>
+            <a:spLocks noGrp="1"/>
+          </p:cNvSpPr>
+          <p:nvPr>
+            <p:ph idx="1"/>
+          </p:nvPr>
+        </p:nvSpPr>
+        <p:spPr/>
         <p:txBody>
           <a:bodyPr/>
           <a:lstStyle/>
           <a:p>
             <a:pPr lvl="0" indent="0" marL="0">
-              <a:buNone/>
-            </a:pPr>
-            <a:r>
-              <a:rPr/>
+              <a:spcBef>
+                <a:spcPts val="3000"/>
+              </a:spcBef>
+              <a:buNone/>
+            </a:pPr>
+            <a:r>
+              <a:rPr b="1"/>
               <a:t>Step 6 · Make it look professional</a:t>
             </a:r>
           </a:p>
-        </p:txBody>
-      </p:sp>
-      <p:sp>
-        <p:nvSpPr>
-          <p:cNvPr id="3" name="Content Placeholder 2"/>
-          <p:cNvSpPr>
-            <a:spLocks noGrp="1"/>
-          </p:cNvSpPr>
-          <p:nvPr>
-            <p:ph idx="1"/>
-          </p:nvPr>
-        </p:nvSpPr>
-        <p:spPr/>
-        <p:txBody>
-          <a:bodyPr/>
-          <a:lstStyle/>
           <a:p>
             <a:pPr lvl="0" indent="0" marL="0">
               <a:buNone/>
@@ -5684,48 +5965,30 @@
       </p:grpSpPr>
       <p:sp>
         <p:nvSpPr>
-          <p:cNvPr id="2" name="Title 1"/>
-          <p:cNvSpPr>
-            <a:spLocks noGrp="1"/>
-          </p:cNvSpPr>
-          <p:nvPr>
-            <p:ph type="title"/>
-          </p:nvPr>
-        </p:nvSpPr>
-        <p:spPr>
-          <a:xfrm>
-            <a:off x="0" y="0"/>
-            <a:ext cx="9144000" cy="582780"/>
-          </a:xfrm>
-        </p:spPr>
+          <p:cNvPr id="3" name="Content Placeholder 2"/>
+          <p:cNvSpPr>
+            <a:spLocks noGrp="1"/>
+          </p:cNvSpPr>
+          <p:nvPr>
+            <p:ph idx="1"/>
+          </p:nvPr>
+        </p:nvSpPr>
+        <p:spPr/>
         <p:txBody>
           <a:bodyPr/>
           <a:lstStyle/>
           <a:p>
             <a:pPr lvl="0" indent="0" marL="0">
-              <a:buNone/>
-            </a:pPr>
-            <a:r>
-              <a:rPr/>
+              <a:spcBef>
+                <a:spcPts val="3000"/>
+              </a:spcBef>
+              <a:buNone/>
+            </a:pPr>
+            <a:r>
+              <a:rPr b="1"/>
               <a:t>Step 7 · One file, three outputs (optional)</a:t>
             </a:r>
           </a:p>
-        </p:txBody>
-      </p:sp>
-      <p:sp>
-        <p:nvSpPr>
-          <p:cNvPr id="3" name="Content Placeholder 2"/>
-          <p:cNvSpPr>
-            <a:spLocks noGrp="1"/>
-          </p:cNvSpPr>
-          <p:nvPr>
-            <p:ph idx="1"/>
-          </p:nvPr>
-        </p:nvSpPr>
-        <p:spPr/>
-        <p:txBody>
-          <a:bodyPr/>
-          <a:lstStyle/>
           <a:p>
             <a:pPr lvl="0" indent="0" marL="0">
               <a:buNone/>
